--- a/copilot_github/1_intro/1_intro.pptx
+++ b/copilot_github/1_intro/1_intro.pptx
@@ -5,15 +5,17 @@
     <p:sldMasterId id="2147483648" r:id="rId1"/>
   </p:sldMasterIdLst>
   <p:notesMasterIdLst>
-    <p:notesMasterId r:id="rId5"/>
+    <p:notesMasterId r:id="rId7"/>
   </p:notesMasterIdLst>
   <p:handoutMasterIdLst>
-    <p:handoutMasterId r:id="rId6"/>
+    <p:handoutMasterId r:id="rId8"/>
   </p:handoutMasterIdLst>
   <p:sldIdLst>
     <p:sldId id="256" r:id="rId2"/>
     <p:sldId id="270" r:id="rId3"/>
     <p:sldId id="269" r:id="rId4"/>
+    <p:sldId id="271" r:id="rId5"/>
+    <p:sldId id="272" r:id="rId6"/>
   </p:sldIdLst>
   <p:sldSz cx="12192000" cy="6858000"/>
   <p:notesSz cx="6858000" cy="9144000"/>
@@ -217,7 +219,7 @@
           <a:p>
             <a:fld id="{7BAEECA8-D063-486F-AE31-5020270C1449}" type="datetimeFigureOut">
               <a:rPr lang="en-US" smtClean="0"/>
-              <a:t>6/25/2026</a:t>
+              <a:t>9/19/2026</a:t>
             </a:fld>
             <a:endParaRPr lang="en-US"/>
           </a:p>
@@ -394,7 +396,7 @@
           <a:p>
             <a:fld id="{E0F4871E-3672-42BE-BBA1-0BAFEE555536}" type="datetimeFigureOut">
               <a:rPr lang="en-US" smtClean="0"/>
-              <a:t>6/25/2026</a:t>
+              <a:t>9/19/2026</a:t>
             </a:fld>
             <a:endParaRPr lang="en-US"/>
           </a:p>
@@ -808,7 +810,7 @@
           <a:p>
             <a:fld id="{6383FAE1-13DE-4511-8C1B-C8AFB720664C}" type="datetimeFigureOut">
               <a:rPr lang="en-US" smtClean="0"/>
-              <a:t>6/25/2026</a:t>
+              <a:t>9/19/2026</a:t>
             </a:fld>
             <a:endParaRPr lang="en-US"/>
           </a:p>
@@ -1006,7 +1008,7 @@
           <a:p>
             <a:fld id="{6383FAE1-13DE-4511-8C1B-C8AFB720664C}" type="datetimeFigureOut">
               <a:rPr lang="en-US" smtClean="0"/>
-              <a:t>6/25/2026</a:t>
+              <a:t>9/19/2026</a:t>
             </a:fld>
             <a:endParaRPr lang="en-US"/>
           </a:p>
@@ -1214,7 +1216,7 @@
           <a:p>
             <a:fld id="{6383FAE1-13DE-4511-8C1B-C8AFB720664C}" type="datetimeFigureOut">
               <a:rPr lang="en-US" smtClean="0"/>
-              <a:t>6/25/2026</a:t>
+              <a:t>9/19/2026</a:t>
             </a:fld>
             <a:endParaRPr lang="en-US"/>
           </a:p>
@@ -1412,7 +1414,7 @@
           <a:p>
             <a:fld id="{6383FAE1-13DE-4511-8C1B-C8AFB720664C}" type="datetimeFigureOut">
               <a:rPr lang="en-US" smtClean="0"/>
-              <a:t>6/25/2026</a:t>
+              <a:t>9/19/2026</a:t>
             </a:fld>
             <a:endParaRPr lang="en-US"/>
           </a:p>
@@ -1687,7 +1689,7 @@
           <a:p>
             <a:fld id="{6383FAE1-13DE-4511-8C1B-C8AFB720664C}" type="datetimeFigureOut">
               <a:rPr lang="en-US" smtClean="0"/>
-              <a:t>6/25/2026</a:t>
+              <a:t>9/19/2026</a:t>
             </a:fld>
             <a:endParaRPr lang="en-US"/>
           </a:p>
@@ -1952,7 +1954,7 @@
           <a:p>
             <a:fld id="{6383FAE1-13DE-4511-8C1B-C8AFB720664C}" type="datetimeFigureOut">
               <a:rPr lang="en-US" smtClean="0"/>
-              <a:t>6/25/2026</a:t>
+              <a:t>9/19/2026</a:t>
             </a:fld>
             <a:endParaRPr lang="en-US"/>
           </a:p>
@@ -2364,7 +2366,7 @@
           <a:p>
             <a:fld id="{6383FAE1-13DE-4511-8C1B-C8AFB720664C}" type="datetimeFigureOut">
               <a:rPr lang="en-US" smtClean="0"/>
-              <a:t>6/25/2026</a:t>
+              <a:t>9/19/2026</a:t>
             </a:fld>
             <a:endParaRPr lang="en-US"/>
           </a:p>
@@ -2505,7 +2507,7 @@
           <a:p>
             <a:fld id="{6383FAE1-13DE-4511-8C1B-C8AFB720664C}" type="datetimeFigureOut">
               <a:rPr lang="en-US" smtClean="0"/>
-              <a:t>6/25/2026</a:t>
+              <a:t>9/19/2026</a:t>
             </a:fld>
             <a:endParaRPr lang="en-US"/>
           </a:p>
@@ -2618,7 +2620,7 @@
           <a:p>
             <a:fld id="{6383FAE1-13DE-4511-8C1B-C8AFB720664C}" type="datetimeFigureOut">
               <a:rPr lang="en-US" smtClean="0"/>
-              <a:t>6/25/2026</a:t>
+              <a:t>9/19/2026</a:t>
             </a:fld>
             <a:endParaRPr lang="en-US"/>
           </a:p>
@@ -2929,7 +2931,7 @@
           <a:p>
             <a:fld id="{6383FAE1-13DE-4511-8C1B-C8AFB720664C}" type="datetimeFigureOut">
               <a:rPr lang="en-US" smtClean="0"/>
-              <a:t>6/25/2026</a:t>
+              <a:t>9/19/2026</a:t>
             </a:fld>
             <a:endParaRPr lang="en-US"/>
           </a:p>
@@ -3220,7 +3222,7 @@
           <a:p>
             <a:fld id="{6383FAE1-13DE-4511-8C1B-C8AFB720664C}" type="datetimeFigureOut">
               <a:rPr lang="en-US" smtClean="0"/>
-              <a:t>6/25/2026</a:t>
+              <a:t>9/19/2026</a:t>
             </a:fld>
             <a:endParaRPr lang="en-US"/>
           </a:p>
@@ -3464,7 +3466,7 @@
           <a:p>
             <a:fld id="{6383FAE1-13DE-4511-8C1B-C8AFB720664C}" type="datetimeFigureOut">
               <a:rPr lang="en-US" smtClean="0"/>
-              <a:t>6/25/2026</a:t>
+              <a:t>9/19/2026</a:t>
             </a:fld>
             <a:endParaRPr lang="en-US"/>
           </a:p>
@@ -4672,10 +4674,647 @@
           <a:chExt cx="0" cy="0"/>
         </a:xfrm>
       </p:grpSpPr>
+      <p:sp>
+        <p:nvSpPr>
+          <p:cNvPr id="3" name="TextBox 2">
+            <a:extLst>
+              <a:ext uri="{FF2B5EF4-FFF2-40B4-BE49-F238E27FC236}">
+                <a16:creationId xmlns:a16="http://schemas.microsoft.com/office/drawing/2014/main" id="{1F275E6A-4FC5-5A50-EC29-4F4D9C22DC2D}"/>
+              </a:ext>
+            </a:extLst>
+          </p:cNvPr>
+          <p:cNvSpPr txBox="1"/>
+          <p:nvPr/>
+        </p:nvSpPr>
+        <p:spPr>
+          <a:xfrm>
+            <a:off x="371475" y="0"/>
+            <a:ext cx="10277475" cy="1019446"/>
+          </a:xfrm>
+          <a:prstGeom prst="rect">
+            <a:avLst/>
+          </a:prstGeom>
+          <a:noFill/>
+        </p:spPr>
+        <p:txBody>
+          <a:bodyPr wrap="square">
+            <a:spAutoFit/>
+          </a:bodyPr>
+          <a:lstStyle/>
+          <a:p>
+            <a:pPr marL="0" marR="0">
+              <a:lnSpc>
+                <a:spcPct val="115000"/>
+              </a:lnSpc>
+              <a:spcAft>
+                <a:spcPts val="800"/>
+              </a:spcAft>
+              <a:buNone/>
+            </a:pPr>
+            <a:r>
+              <a:rPr lang="en-US" sz="2400" b="1" kern="100" dirty="0">
+                <a:solidFill>
+                  <a:schemeClr val="accent6">
+                    <a:lumMod val="60000"/>
+                    <a:lumOff val="40000"/>
+                  </a:schemeClr>
+                </a:solidFill>
+                <a:effectLst/>
+                <a:latin typeface="Calibri" panose="020F0502020204030204" pitchFamily="34" charset="0"/>
+                <a:ea typeface="Calibri" panose="020F0502020204030204" pitchFamily="34" charset="0"/>
+                <a:cs typeface="Times New Roman" panose="02020603050405020304" pitchFamily="18" charset="0"/>
+              </a:rPr>
+              <a:t>Examples of Human In The Loop:</a:t>
+            </a:r>
+          </a:p>
+          <a:p>
+            <a:pPr marL="0" marR="0">
+              <a:lnSpc>
+                <a:spcPct val="115000"/>
+              </a:lnSpc>
+              <a:spcAft>
+                <a:spcPts val="800"/>
+              </a:spcAft>
+              <a:buNone/>
+            </a:pPr>
+            <a:r>
+              <a:rPr lang="en-US" sz="2400" kern="100" dirty="0">
+                <a:solidFill>
+                  <a:schemeClr val="accent6">
+                    <a:lumMod val="60000"/>
+                    <a:lumOff val="40000"/>
+                  </a:schemeClr>
+                </a:solidFill>
+                <a:effectLst/>
+                <a:latin typeface="Calibri" panose="020F0502020204030204" pitchFamily="34" charset="0"/>
+                <a:ea typeface="Calibri" panose="020F0502020204030204" pitchFamily="34" charset="0"/>
+                <a:cs typeface="Times New Roman" panose="02020603050405020304" pitchFamily="18" charset="0"/>
+              </a:rPr>
+              <a:t>I wanted to increase the scroll size of the terminal in </a:t>
+            </a:r>
+            <a:r>
+              <a:rPr lang="en-US" sz="2400" kern="100" dirty="0" err="1">
+                <a:solidFill>
+                  <a:schemeClr val="accent6">
+                    <a:lumMod val="60000"/>
+                    <a:lumOff val="40000"/>
+                  </a:schemeClr>
+                </a:solidFill>
+                <a:effectLst/>
+                <a:latin typeface="Calibri" panose="020F0502020204030204" pitchFamily="34" charset="0"/>
+                <a:ea typeface="Calibri" panose="020F0502020204030204" pitchFamily="34" charset="0"/>
+                <a:cs typeface="Times New Roman" panose="02020603050405020304" pitchFamily="18" charset="0"/>
+              </a:rPr>
+              <a:t>vscode</a:t>
+            </a:r>
+            <a:r>
+              <a:rPr lang="en-US" sz="2400" kern="100" dirty="0">
+                <a:solidFill>
+                  <a:schemeClr val="accent6">
+                    <a:lumMod val="60000"/>
+                    <a:lumOff val="40000"/>
+                  </a:schemeClr>
+                </a:solidFill>
+                <a:effectLst/>
+                <a:latin typeface="Calibri" panose="020F0502020204030204" pitchFamily="34" charset="0"/>
+                <a:ea typeface="Calibri" panose="020F0502020204030204" pitchFamily="34" charset="0"/>
+                <a:cs typeface="Times New Roman" panose="02020603050405020304" pitchFamily="18" charset="0"/>
+              </a:rPr>
+              <a:t>.</a:t>
+            </a:r>
+          </a:p>
+        </p:txBody>
+      </p:sp>
+      <p:pic>
+        <p:nvPicPr>
+          <p:cNvPr id="5" name="Picture 4">
+            <a:extLst>
+              <a:ext uri="{FF2B5EF4-FFF2-40B4-BE49-F238E27FC236}">
+                <a16:creationId xmlns:a16="http://schemas.microsoft.com/office/drawing/2014/main" id="{F763393C-6E1B-8C68-878B-A29490320BB1}"/>
+              </a:ext>
+            </a:extLst>
+          </p:cNvPr>
+          <p:cNvPicPr>
+            <a:picLocks noChangeAspect="1"/>
+          </p:cNvPicPr>
+          <p:nvPr/>
+        </p:nvPicPr>
+        <p:blipFill>
+          <a:blip r:embed="rId2"/>
+          <a:stretch>
+            <a:fillRect/>
+          </a:stretch>
+        </p:blipFill>
+        <p:spPr>
+          <a:xfrm>
+            <a:off x="1748943" y="1019446"/>
+            <a:ext cx="8900007" cy="5262689"/>
+          </a:xfrm>
+          <a:prstGeom prst="rect">
+            <a:avLst/>
+          </a:prstGeom>
+        </p:spPr>
+      </p:pic>
+      <p:sp>
+        <p:nvSpPr>
+          <p:cNvPr id="6" name="TextBox 5">
+            <a:extLst>
+              <a:ext uri="{FF2B5EF4-FFF2-40B4-BE49-F238E27FC236}">
+                <a16:creationId xmlns:a16="http://schemas.microsoft.com/office/drawing/2014/main" id="{C73CCED9-C056-114D-8150-506FC8EED10B}"/>
+              </a:ext>
+            </a:extLst>
+          </p:cNvPr>
+          <p:cNvSpPr txBox="1"/>
+          <p:nvPr/>
+        </p:nvSpPr>
+        <p:spPr>
+          <a:xfrm>
+            <a:off x="11096625" y="6282135"/>
+            <a:ext cx="842988" cy="369332"/>
+          </a:xfrm>
+          <a:prstGeom prst="rect">
+            <a:avLst/>
+          </a:prstGeom>
+          <a:noFill/>
+        </p:spPr>
+        <p:txBody>
+          <a:bodyPr wrap="none" rtlCol="0">
+            <a:spAutoFit/>
+          </a:bodyPr>
+          <a:lstStyle/>
+          <a:p>
+            <a:r>
+              <a:rPr lang="en-US" dirty="0" err="1">
+                <a:solidFill>
+                  <a:schemeClr val="accent6">
+                    <a:lumMod val="60000"/>
+                    <a:lumOff val="40000"/>
+                  </a:schemeClr>
+                </a:solidFill>
+              </a:rPr>
+              <a:t>Cont</a:t>
+            </a:r>
+            <a:r>
+              <a:rPr lang="en-US" dirty="0">
+                <a:solidFill>
+                  <a:schemeClr val="accent6">
+                    <a:lumMod val="60000"/>
+                    <a:lumOff val="40000"/>
+                  </a:schemeClr>
+                </a:solidFill>
+              </a:rPr>
+              <a:t>….</a:t>
+            </a:r>
+            <a:endParaRPr lang="en-IN" dirty="0">
+              <a:solidFill>
+                <a:schemeClr val="accent6">
+                  <a:lumMod val="60000"/>
+                  <a:lumOff val="40000"/>
+                </a:schemeClr>
+              </a:solidFill>
+            </a:endParaRPr>
+          </a:p>
+        </p:txBody>
+      </p:sp>
     </p:spTree>
     <p:extLst>
       <p:ext uri="{BB962C8B-B14F-4D97-AF65-F5344CB8AC3E}">
         <p14:creationId xmlns:p14="http://schemas.microsoft.com/office/powerpoint/2010/main" val="2649866071"/>
+      </p:ext>
+    </p:extLst>
+  </p:cSld>
+  <p:clrMapOvr>
+    <a:masterClrMapping/>
+  </p:clrMapOvr>
+</p:sld>
+</file>
+
+<file path=ppt/slides/slide4.xml><?xml version="1.0" encoding="utf-8"?>
+<p:sld xmlns:a="http://schemas.openxmlformats.org/drawingml/2006/main" xmlns:r="http://schemas.openxmlformats.org/officeDocument/2006/relationships" xmlns:p="http://schemas.openxmlformats.org/presentationml/2006/main">
+  <p:cSld>
+    <p:spTree>
+      <p:nvGrpSpPr>
+        <p:cNvPr id="1" name="">
+          <a:extLst>
+            <a:ext uri="{FF2B5EF4-FFF2-40B4-BE49-F238E27FC236}">
+              <a16:creationId xmlns:a16="http://schemas.microsoft.com/office/drawing/2014/main" id="{30C6169F-18E3-3646-3083-3C5298B9956F}"/>
+            </a:ext>
+          </a:extLst>
+        </p:cNvPr>
+        <p:cNvGrpSpPr/>
+        <p:nvPr/>
+      </p:nvGrpSpPr>
+      <p:grpSpPr>
+        <a:xfrm>
+          <a:off x="0" y="0"/>
+          <a:ext cx="0" cy="0"/>
+          <a:chOff x="0" y="0"/>
+          <a:chExt cx="0" cy="0"/>
+        </a:xfrm>
+      </p:grpSpPr>
+      <p:pic>
+        <p:nvPicPr>
+          <p:cNvPr id="4" name="Picture 3">
+            <a:extLst>
+              <a:ext uri="{FF2B5EF4-FFF2-40B4-BE49-F238E27FC236}">
+                <a16:creationId xmlns:a16="http://schemas.microsoft.com/office/drawing/2014/main" id="{3E96D4A4-74D2-EB71-305F-DEC3CF161C6B}"/>
+              </a:ext>
+            </a:extLst>
+          </p:cNvPr>
+          <p:cNvPicPr>
+            <a:picLocks noChangeAspect="1"/>
+          </p:cNvPicPr>
+          <p:nvPr/>
+        </p:nvPicPr>
+        <p:blipFill>
+          <a:blip r:embed="rId2"/>
+          <a:stretch>
+            <a:fillRect/>
+          </a:stretch>
+        </p:blipFill>
+        <p:spPr>
+          <a:xfrm>
+            <a:off x="2027961" y="1000126"/>
+            <a:ext cx="9283655" cy="5801148"/>
+          </a:xfrm>
+          <a:prstGeom prst="rect">
+            <a:avLst/>
+          </a:prstGeom>
+        </p:spPr>
+      </p:pic>
+      <p:sp>
+        <p:nvSpPr>
+          <p:cNvPr id="3" name="TextBox 2">
+            <a:extLst>
+              <a:ext uri="{FF2B5EF4-FFF2-40B4-BE49-F238E27FC236}">
+                <a16:creationId xmlns:a16="http://schemas.microsoft.com/office/drawing/2014/main" id="{5675B980-D164-8777-E875-D52A720AAD98}"/>
+              </a:ext>
+            </a:extLst>
+          </p:cNvPr>
+          <p:cNvSpPr txBox="1"/>
+          <p:nvPr/>
+        </p:nvSpPr>
+        <p:spPr>
+          <a:xfrm>
+            <a:off x="390525" y="0"/>
+            <a:ext cx="11315700" cy="1019446"/>
+          </a:xfrm>
+          <a:prstGeom prst="rect">
+            <a:avLst/>
+          </a:prstGeom>
+          <a:noFill/>
+        </p:spPr>
+        <p:txBody>
+          <a:bodyPr wrap="square">
+            <a:spAutoFit/>
+          </a:bodyPr>
+          <a:lstStyle/>
+          <a:p>
+            <a:pPr marL="0" marR="0">
+              <a:lnSpc>
+                <a:spcPct val="115000"/>
+              </a:lnSpc>
+              <a:spcAft>
+                <a:spcPts val="800"/>
+              </a:spcAft>
+              <a:buNone/>
+            </a:pPr>
+            <a:r>
+              <a:rPr lang="en-US" sz="2400" b="1" kern="100" dirty="0">
+                <a:solidFill>
+                  <a:schemeClr val="accent6">
+                    <a:lumMod val="60000"/>
+                    <a:lumOff val="40000"/>
+                  </a:schemeClr>
+                </a:solidFill>
+                <a:effectLst/>
+                <a:latin typeface="Calibri" panose="020F0502020204030204" pitchFamily="34" charset="0"/>
+                <a:ea typeface="Calibri" panose="020F0502020204030204" pitchFamily="34" charset="0"/>
+                <a:cs typeface="Times New Roman" panose="02020603050405020304" pitchFamily="18" charset="0"/>
+              </a:rPr>
+              <a:t>….</a:t>
+            </a:r>
+            <a:r>
+              <a:rPr lang="en-US" sz="2400" b="1" kern="100" dirty="0" err="1">
+                <a:solidFill>
+                  <a:schemeClr val="accent6">
+                    <a:lumMod val="60000"/>
+                    <a:lumOff val="40000"/>
+                  </a:schemeClr>
+                </a:solidFill>
+                <a:effectLst/>
+                <a:latin typeface="Calibri" panose="020F0502020204030204" pitchFamily="34" charset="0"/>
+                <a:ea typeface="Calibri" panose="020F0502020204030204" pitchFamily="34" charset="0"/>
+                <a:cs typeface="Times New Roman" panose="02020603050405020304" pitchFamily="18" charset="0"/>
+              </a:rPr>
+              <a:t>Cont</a:t>
+            </a:r>
+            <a:endParaRPr lang="en-US" sz="2400" b="1" kern="100" dirty="0">
+              <a:solidFill>
+                <a:schemeClr val="accent6">
+                  <a:lumMod val="60000"/>
+                  <a:lumOff val="40000"/>
+                </a:schemeClr>
+              </a:solidFill>
+              <a:effectLst/>
+              <a:latin typeface="Calibri" panose="020F0502020204030204" pitchFamily="34" charset="0"/>
+              <a:ea typeface="Calibri" panose="020F0502020204030204" pitchFamily="34" charset="0"/>
+              <a:cs typeface="Times New Roman" panose="02020603050405020304" pitchFamily="18" charset="0"/>
+            </a:endParaRPr>
+          </a:p>
+          <a:p>
+            <a:pPr marL="0" marR="0">
+              <a:lnSpc>
+                <a:spcPct val="115000"/>
+              </a:lnSpc>
+              <a:spcAft>
+                <a:spcPts val="800"/>
+              </a:spcAft>
+              <a:buNone/>
+            </a:pPr>
+            <a:r>
+              <a:rPr lang="en-US" sz="2400" kern="100" dirty="0">
+                <a:solidFill>
+                  <a:schemeClr val="accent6">
+                    <a:lumMod val="60000"/>
+                    <a:lumOff val="40000"/>
+                  </a:schemeClr>
+                </a:solidFill>
+                <a:effectLst/>
+                <a:latin typeface="Calibri" panose="020F0502020204030204" pitchFamily="34" charset="0"/>
+                <a:ea typeface="Calibri" panose="020F0502020204030204" pitchFamily="34" charset="0"/>
+                <a:cs typeface="Times New Roman" panose="02020603050405020304" pitchFamily="18" charset="0"/>
+              </a:rPr>
+              <a:t>I asked it to increase scroll back size to 30,000 and also tell me the file location </a:t>
+            </a:r>
+          </a:p>
+        </p:txBody>
+      </p:sp>
+      <p:sp>
+        <p:nvSpPr>
+          <p:cNvPr id="8" name="TextBox 7">
+            <a:extLst>
+              <a:ext uri="{FF2B5EF4-FFF2-40B4-BE49-F238E27FC236}">
+                <a16:creationId xmlns:a16="http://schemas.microsoft.com/office/drawing/2014/main" id="{4E927F79-06F8-C69E-B647-D71D3E5FF8EC}"/>
+              </a:ext>
+            </a:extLst>
+          </p:cNvPr>
+          <p:cNvSpPr txBox="1"/>
+          <p:nvPr/>
+        </p:nvSpPr>
+        <p:spPr>
+          <a:xfrm>
+            <a:off x="257175" y="5781675"/>
+            <a:ext cx="1638300" cy="916854"/>
+          </a:xfrm>
+          <a:prstGeom prst="rect">
+            <a:avLst/>
+          </a:prstGeom>
+          <a:noFill/>
+        </p:spPr>
+        <p:txBody>
+          <a:bodyPr wrap="square">
+            <a:spAutoFit/>
+          </a:bodyPr>
+          <a:lstStyle/>
+          <a:p>
+            <a:pPr marL="0" marR="0">
+              <a:lnSpc>
+                <a:spcPct val="115000"/>
+              </a:lnSpc>
+              <a:spcAft>
+                <a:spcPts val="800"/>
+              </a:spcAft>
+              <a:buNone/>
+            </a:pPr>
+            <a:r>
+              <a:rPr lang="en-US" sz="2400" b="1" kern="100" dirty="0">
+                <a:solidFill>
+                  <a:schemeClr val="accent6">
+                    <a:lumMod val="60000"/>
+                    <a:lumOff val="40000"/>
+                  </a:schemeClr>
+                </a:solidFill>
+                <a:effectLst/>
+                <a:latin typeface="Calibri" panose="020F0502020204030204" pitchFamily="34" charset="0"/>
+                <a:ea typeface="Calibri" panose="020F0502020204030204" pitchFamily="34" charset="0"/>
+                <a:cs typeface="Times New Roman" panose="02020603050405020304" pitchFamily="18" charset="0"/>
+              </a:rPr>
+              <a:t>Human In the Loop</a:t>
+            </a:r>
+            <a:endParaRPr lang="en-US" sz="2400" kern="100" dirty="0">
+              <a:solidFill>
+                <a:schemeClr val="accent6">
+                  <a:lumMod val="60000"/>
+                  <a:lumOff val="40000"/>
+                </a:schemeClr>
+              </a:solidFill>
+              <a:effectLst/>
+              <a:latin typeface="Calibri" panose="020F0502020204030204" pitchFamily="34" charset="0"/>
+              <a:ea typeface="Calibri" panose="020F0502020204030204" pitchFamily="34" charset="0"/>
+              <a:cs typeface="Times New Roman" panose="02020603050405020304" pitchFamily="18" charset="0"/>
+            </a:endParaRPr>
+          </a:p>
+        </p:txBody>
+      </p:sp>
+      <p:sp>
+        <p:nvSpPr>
+          <p:cNvPr id="9" name="Arrow: Right 8">
+            <a:extLst>
+              <a:ext uri="{FF2B5EF4-FFF2-40B4-BE49-F238E27FC236}">
+                <a16:creationId xmlns:a16="http://schemas.microsoft.com/office/drawing/2014/main" id="{1290E0E0-8349-55FC-FF76-C7F911940B82}"/>
+              </a:ext>
+            </a:extLst>
+          </p:cNvPr>
+          <p:cNvSpPr/>
+          <p:nvPr/>
+        </p:nvSpPr>
+        <p:spPr>
+          <a:xfrm>
+            <a:off x="1647825" y="6286500"/>
+            <a:ext cx="380136" cy="257175"/>
+          </a:xfrm>
+          <a:prstGeom prst="rightArrow">
+            <a:avLst/>
+          </a:prstGeom>
+        </p:spPr>
+        <p:style>
+          <a:lnRef idx="2">
+            <a:schemeClr val="accent1">
+              <a:shade val="15000"/>
+            </a:schemeClr>
+          </a:lnRef>
+          <a:fillRef idx="1">
+            <a:schemeClr val="accent1"/>
+          </a:fillRef>
+          <a:effectRef idx="0">
+            <a:schemeClr val="accent1"/>
+          </a:effectRef>
+          <a:fontRef idx="minor">
+            <a:schemeClr val="lt1"/>
+          </a:fontRef>
+        </p:style>
+        <p:txBody>
+          <a:bodyPr rtlCol="0" anchor="ctr"/>
+          <a:lstStyle/>
+          <a:p>
+            <a:pPr algn="ctr"/>
+            <a:endParaRPr lang="en-IN"/>
+          </a:p>
+        </p:txBody>
+      </p:sp>
+    </p:spTree>
+    <p:extLst>
+      <p:ext uri="{BB962C8B-B14F-4D97-AF65-F5344CB8AC3E}">
+        <p14:creationId xmlns:p14="http://schemas.microsoft.com/office/powerpoint/2010/main" val="1770381474"/>
+      </p:ext>
+    </p:extLst>
+  </p:cSld>
+  <p:clrMapOvr>
+    <a:masterClrMapping/>
+  </p:clrMapOvr>
+</p:sld>
+</file>
+
+<file path=ppt/slides/slide5.xml><?xml version="1.0" encoding="utf-8"?>
+<p:sld xmlns:a="http://schemas.openxmlformats.org/drawingml/2006/main" xmlns:r="http://schemas.openxmlformats.org/officeDocument/2006/relationships" xmlns:p="http://schemas.openxmlformats.org/presentationml/2006/main">
+  <p:cSld>
+    <p:spTree>
+      <p:nvGrpSpPr>
+        <p:cNvPr id="1" name="">
+          <a:extLst>
+            <a:ext uri="{FF2B5EF4-FFF2-40B4-BE49-F238E27FC236}">
+              <a16:creationId xmlns:a16="http://schemas.microsoft.com/office/drawing/2014/main" id="{603C546F-77D3-0BA9-5FC4-F7E911E9A8A6}"/>
+            </a:ext>
+          </a:extLst>
+        </p:cNvPr>
+        <p:cNvGrpSpPr/>
+        <p:nvPr/>
+      </p:nvGrpSpPr>
+      <p:grpSpPr>
+        <a:xfrm>
+          <a:off x="0" y="0"/>
+          <a:ext cx="0" cy="0"/>
+          <a:chOff x="0" y="0"/>
+          <a:chExt cx="0" cy="0"/>
+        </a:xfrm>
+      </p:grpSpPr>
+      <p:sp>
+        <p:nvSpPr>
+          <p:cNvPr id="3" name="TextBox 2">
+            <a:extLst>
+              <a:ext uri="{FF2B5EF4-FFF2-40B4-BE49-F238E27FC236}">
+                <a16:creationId xmlns:a16="http://schemas.microsoft.com/office/drawing/2014/main" id="{5DC46295-42A7-E2C3-CFC1-1287807D04E9}"/>
+              </a:ext>
+            </a:extLst>
+          </p:cNvPr>
+          <p:cNvSpPr txBox="1"/>
+          <p:nvPr/>
+        </p:nvSpPr>
+        <p:spPr>
+          <a:xfrm>
+            <a:off x="390525" y="0"/>
+            <a:ext cx="11315700" cy="492122"/>
+          </a:xfrm>
+          <a:prstGeom prst="rect">
+            <a:avLst/>
+          </a:prstGeom>
+          <a:noFill/>
+        </p:spPr>
+        <p:txBody>
+          <a:bodyPr wrap="square">
+            <a:spAutoFit/>
+          </a:bodyPr>
+          <a:lstStyle/>
+          <a:p>
+            <a:pPr marL="0" marR="0">
+              <a:lnSpc>
+                <a:spcPct val="115000"/>
+              </a:lnSpc>
+              <a:spcAft>
+                <a:spcPts val="800"/>
+              </a:spcAft>
+              <a:buNone/>
+            </a:pPr>
+            <a:r>
+              <a:rPr lang="en-US" sz="2400" b="1" kern="100" dirty="0">
+                <a:solidFill>
+                  <a:schemeClr val="accent6">
+                    <a:lumMod val="60000"/>
+                    <a:lumOff val="40000"/>
+                  </a:schemeClr>
+                </a:solidFill>
+                <a:effectLst/>
+                <a:latin typeface="Calibri" panose="020F0502020204030204" pitchFamily="34" charset="0"/>
+                <a:ea typeface="Calibri" panose="020F0502020204030204" pitchFamily="34" charset="0"/>
+                <a:cs typeface="Times New Roman" panose="02020603050405020304" pitchFamily="18" charset="0"/>
+              </a:rPr>
+              <a:t>….</a:t>
+            </a:r>
+            <a:r>
+              <a:rPr lang="en-US" sz="2400" b="1" kern="100" dirty="0" err="1">
+                <a:solidFill>
+                  <a:schemeClr val="accent6">
+                    <a:lumMod val="60000"/>
+                    <a:lumOff val="40000"/>
+                  </a:schemeClr>
+                </a:solidFill>
+                <a:effectLst/>
+                <a:latin typeface="Calibri" panose="020F0502020204030204" pitchFamily="34" charset="0"/>
+                <a:ea typeface="Calibri" panose="020F0502020204030204" pitchFamily="34" charset="0"/>
+                <a:cs typeface="Times New Roman" panose="02020603050405020304" pitchFamily="18" charset="0"/>
+              </a:rPr>
+              <a:t>Cont</a:t>
+            </a:r>
+            <a:endParaRPr lang="en-US" sz="2400" b="1" kern="100" dirty="0">
+              <a:solidFill>
+                <a:schemeClr val="accent6">
+                  <a:lumMod val="60000"/>
+                  <a:lumOff val="40000"/>
+                </a:schemeClr>
+              </a:solidFill>
+              <a:effectLst/>
+              <a:latin typeface="Calibri" panose="020F0502020204030204" pitchFamily="34" charset="0"/>
+              <a:ea typeface="Calibri" panose="020F0502020204030204" pitchFamily="34" charset="0"/>
+              <a:cs typeface="Times New Roman" panose="02020603050405020304" pitchFamily="18" charset="0"/>
+            </a:endParaRPr>
+          </a:p>
+        </p:txBody>
+      </p:sp>
+      <p:pic>
+        <p:nvPicPr>
+          <p:cNvPr id="5" name="Picture 4">
+            <a:extLst>
+              <a:ext uri="{FF2B5EF4-FFF2-40B4-BE49-F238E27FC236}">
+                <a16:creationId xmlns:a16="http://schemas.microsoft.com/office/drawing/2014/main" id="{27C1294C-929E-B2E5-7AB2-6D57DE435FF3}"/>
+              </a:ext>
+            </a:extLst>
+          </p:cNvPr>
+          <p:cNvPicPr>
+            <a:picLocks noChangeAspect="1"/>
+          </p:cNvPicPr>
+          <p:nvPr/>
+        </p:nvPicPr>
+        <p:blipFill>
+          <a:blip r:embed="rId2"/>
+          <a:stretch>
+            <a:fillRect/>
+          </a:stretch>
+        </p:blipFill>
+        <p:spPr>
+          <a:xfrm>
+            <a:off x="1773214" y="1323975"/>
+            <a:ext cx="9085974" cy="5534025"/>
+          </a:xfrm>
+          <a:prstGeom prst="rect">
+            <a:avLst/>
+          </a:prstGeom>
+        </p:spPr>
+      </p:pic>
+    </p:spTree>
+    <p:extLst>
+      <p:ext uri="{BB962C8B-B14F-4D97-AF65-F5344CB8AC3E}">
+        <p14:creationId xmlns:p14="http://schemas.microsoft.com/office/powerpoint/2010/main" val="2033211577"/>
       </p:ext>
     </p:extLst>
   </p:cSld>
